--- a/assets/powerpoints/module-consultation/C3-la-phrase-negative.pptx
+++ b/assets/powerpoints/module-consultation/C3-la-phrase-negative.pptx
@@ -14409,7 +14409,7 @@
                 </a:solidFill>
                 <a:latin typeface="Verdana"/>
               </a:rPr>
-              <a:t>EN APPRENDRE PLUS</a:t>
+              <a:t>OUVRIR LA MINI-LEÇON</a:t>
             </a:r>
           </a:p>
         </p:txBody>
